--- a/data-eng/decks/w2d2s4.pptx
+++ b/data-eng/decks/w2d2s4.pptx
@@ -8165,7 +8165,7 @@
                 <a:ea typeface="Pretendard"/>
                 <a:cs typeface="Pretendard"/>
               </a:rPr>
-              <a:t>지울 행을 먼저 눈으로 확인한다</a:t>
+              <a:t>지울 행을 먼저 눈으로 확인한다 — id 11 (거부된 INSERT 가 10 을 썼다)</a:t>
             </a:r>
           </a:p>
         </p:txBody>

--- a/data-eng/decks/w2d2s4.pptx
+++ b/data-eng/decks/w2d2s4.pptx
@@ -14816,11 +14816,11 @@
             </a:avLst>
           </a:prstGeom>
           <a:solidFill>
-            <a:srgbClr val="FAFBFD"/>
+            <a:srgbClr val="0D2B5E"/>
           </a:solidFill>
           <a:ln w="9525">
             <a:solidFill>
-              <a:srgbClr val="DCE1E8"/>
+              <a:srgbClr val="0D2B5E"/>
             </a:solidFill>
           </a:ln>
           <a:effectLst/>
@@ -14893,7 +14893,7 @@
             <a:r>
               <a:rPr sz="2550" b="1">
                 <a:solidFill>
-                  <a:srgbClr val="E4EBF4"/>
+                  <a:srgbClr val="3B4B7C"/>
                 </a:solidFill>
                 <a:latin typeface="Pretendard"/>
                 <a:ea typeface="Pretendard"/>
@@ -14934,7 +14934,7 @@
             <a:r>
               <a:rPr sz="2700" b="1">
                 <a:solidFill>
-                  <a:srgbClr val="0D2B5E"/>
+                  <a:srgbClr val="FFFFFF"/>
                 </a:solidFill>
                 <a:latin typeface="Pretendard"/>
                 <a:ea typeface="Pretendard"/>
@@ -14955,7 +14955,7 @@
             <a:r>
               <a:rPr sz="2025" b="0">
                 <a:solidFill>
-                  <a:srgbClr val="3D3D3D"/>
+                  <a:srgbClr val="D9E2F0"/>
                 </a:solidFill>
                 <a:latin typeface="Pretendard"/>
                 <a:ea typeface="Pretendard"/>
@@ -14973,13 +14973,13 @@
             <a:r>
               <a:rPr sz="2025" b="0">
                 <a:solidFill>
-                  <a:srgbClr val="3D3D3D"/>
-                </a:solidFill>
-                <a:latin typeface="Pretendard"/>
-                <a:ea typeface="Pretendard"/>
-                <a:cs typeface="Pretendard"/>
-              </a:rPr>
-              <a:t>python3 · pip install pymongo</a:t>
+                  <a:srgbClr val="D9E2F0"/>
+                </a:solidFill>
+                <a:latin typeface="Pretendard"/>
+                <a:ea typeface="Pretendard"/>
+                <a:cs typeface="Pretendard"/>
+              </a:rPr>
+              <a:t>python3 · pip 확인</a:t>
             </a:r>
           </a:p>
         </p:txBody>

--- a/data-eng/decks/w2d2s4.pptx
+++ b/data-eng/decks/w2d2s4.pptx
@@ -3099,7 +3099,7 @@
       <p:grpSpPr/>
       <p:sp>
         <p:nvSpPr>
-          <p:cNvPr id="2" name="Oval 1"/>
+          <p:cNvPr id="2" name="deckgen:decor"/>
           <p:cNvSpPr/>
           <p:nvPr/>
         </p:nvSpPr>
@@ -3129,7 +3129,7 @@
       </p:sp>
       <p:sp>
         <p:nvSpPr>
-          <p:cNvPr id="3" name="Oval 2"/>
+          <p:cNvPr id="3" name="deckgen:decor"/>
           <p:cNvSpPr/>
           <p:nvPr/>
         </p:nvSpPr>
@@ -3159,7 +3159,7 @@
       </p:sp>
       <p:sp>
         <p:nvSpPr>
-          <p:cNvPr id="4" name="Oval 3"/>
+          <p:cNvPr id="4" name="deckgen:decor"/>
           <p:cNvSpPr/>
           <p:nvPr/>
         </p:nvSpPr>
@@ -3189,7 +3189,7 @@
       </p:sp>
       <p:sp>
         <p:nvSpPr>
-          <p:cNvPr id="5" name="Rectangle 4"/>
+          <p:cNvPr id="5" name="deckgen:decor"/>
           <p:cNvSpPr/>
           <p:nvPr/>
         </p:nvSpPr>
@@ -3219,7 +3219,7 @@
       </p:sp>
       <p:sp>
         <p:nvSpPr>
-          <p:cNvPr id="6" name="Oval 5"/>
+          <p:cNvPr id="6" name="deckgen:decor"/>
           <p:cNvSpPr/>
           <p:nvPr/>
         </p:nvSpPr>
@@ -3249,7 +3249,7 @@
       </p:sp>
       <p:sp>
         <p:nvSpPr>
-          <p:cNvPr id="7" name="Oval 6"/>
+          <p:cNvPr id="7" name="deckgen:decor"/>
           <p:cNvSpPr/>
           <p:nvPr/>
         </p:nvSpPr>
@@ -3279,7 +3279,7 @@
       </p:sp>
       <p:sp>
         <p:nvSpPr>
-          <p:cNvPr id="8" name="Oval 7"/>
+          <p:cNvPr id="8" name="deckgen:decor"/>
           <p:cNvSpPr/>
           <p:nvPr/>
         </p:nvSpPr>
@@ -3309,7 +3309,7 @@
       </p:sp>
       <p:sp>
         <p:nvSpPr>
-          <p:cNvPr id="9" name="Oval 8"/>
+          <p:cNvPr id="9" name="deckgen:decor"/>
           <p:cNvSpPr/>
           <p:nvPr/>
         </p:nvSpPr>
@@ -3339,7 +3339,7 @@
       </p:sp>
       <p:sp>
         <p:nvSpPr>
-          <p:cNvPr id="10" name="Rectangle 9"/>
+          <p:cNvPr id="10" name="deckgen:decor"/>
           <p:cNvSpPr/>
           <p:nvPr/>
         </p:nvSpPr>
@@ -3599,7 +3599,7 @@
       <p:grpSpPr/>
       <p:sp>
         <p:nvSpPr>
-          <p:cNvPr id="2" name="Oval 1"/>
+          <p:cNvPr id="2" name="deckgen:decor"/>
           <p:cNvSpPr/>
           <p:nvPr/>
         </p:nvSpPr>
@@ -3629,7 +3629,7 @@
       </p:sp>
       <p:sp>
         <p:nvSpPr>
-          <p:cNvPr id="3" name="Oval 2"/>
+          <p:cNvPr id="3" name="deckgen:decor"/>
           <p:cNvSpPr/>
           <p:nvPr/>
         </p:nvSpPr>
@@ -4406,7 +4406,7 @@
       <p:grpSpPr/>
       <p:sp>
         <p:nvSpPr>
-          <p:cNvPr id="2" name="Oval 1"/>
+          <p:cNvPr id="2" name="deckgen:decor"/>
           <p:cNvSpPr/>
           <p:nvPr/>
         </p:nvSpPr>
@@ -4436,7 +4436,7 @@
       </p:sp>
       <p:sp>
         <p:nvSpPr>
-          <p:cNvPr id="3" name="Oval 2"/>
+          <p:cNvPr id="3" name="deckgen:decor"/>
           <p:cNvSpPr/>
           <p:nvPr/>
         </p:nvSpPr>
@@ -4466,7 +4466,7 @@
       </p:sp>
       <p:sp>
         <p:nvSpPr>
-          <p:cNvPr id="4" name="Oval 3"/>
+          <p:cNvPr id="4" name="deckgen:decor"/>
           <p:cNvSpPr/>
           <p:nvPr/>
         </p:nvSpPr>
@@ -5397,7 +5397,7 @@
       <p:grpSpPr/>
       <p:sp>
         <p:nvSpPr>
-          <p:cNvPr id="2" name="Oval 1"/>
+          <p:cNvPr id="2" name="deckgen:decor"/>
           <p:cNvSpPr/>
           <p:nvPr/>
         </p:nvSpPr>
@@ -5427,7 +5427,7 @@
       </p:sp>
       <p:sp>
         <p:nvSpPr>
-          <p:cNvPr id="3" name="Oval 2"/>
+          <p:cNvPr id="3" name="deckgen:decor"/>
           <p:cNvSpPr/>
           <p:nvPr/>
         </p:nvSpPr>
@@ -5457,7 +5457,7 @@
       </p:sp>
       <p:sp>
         <p:nvSpPr>
-          <p:cNvPr id="4" name="Oval 3"/>
+          <p:cNvPr id="4" name="deckgen:decor"/>
           <p:cNvSpPr/>
           <p:nvPr/>
         </p:nvSpPr>
@@ -7783,7 +7783,7 @@
       <p:grpSpPr/>
       <p:sp>
         <p:nvSpPr>
-          <p:cNvPr id="2" name="Oval 1"/>
+          <p:cNvPr id="2" name="deckgen:decor"/>
           <p:cNvSpPr/>
           <p:nvPr/>
         </p:nvSpPr>
@@ -7813,7 +7813,7 @@
       </p:sp>
       <p:sp>
         <p:nvSpPr>
-          <p:cNvPr id="3" name="Oval 2"/>
+          <p:cNvPr id="3" name="deckgen:decor"/>
           <p:cNvSpPr/>
           <p:nvPr/>
         </p:nvSpPr>
@@ -7843,7 +7843,7 @@
       </p:sp>
       <p:sp>
         <p:nvSpPr>
-          <p:cNvPr id="4" name="Oval 3"/>
+          <p:cNvPr id="4" name="deckgen:decor"/>
           <p:cNvSpPr/>
           <p:nvPr/>
         </p:nvSpPr>
@@ -8810,7 +8810,7 @@
       <p:grpSpPr/>
       <p:sp>
         <p:nvSpPr>
-          <p:cNvPr id="2" name="Oval 1"/>
+          <p:cNvPr id="2" name="deckgen:decor"/>
           <p:cNvSpPr/>
           <p:nvPr/>
         </p:nvSpPr>
@@ -8840,7 +8840,7 @@
       </p:sp>
       <p:sp>
         <p:nvSpPr>
-          <p:cNvPr id="3" name="Oval 2"/>
+          <p:cNvPr id="3" name="deckgen:decor"/>
           <p:cNvSpPr/>
           <p:nvPr/>
         </p:nvSpPr>
@@ -8870,7 +8870,7 @@
       </p:sp>
       <p:sp>
         <p:nvSpPr>
-          <p:cNvPr id="4" name="Oval 3"/>
+          <p:cNvPr id="4" name="deckgen:decor"/>
           <p:cNvSpPr/>
           <p:nvPr/>
         </p:nvSpPr>
@@ -10127,7 +10127,7 @@
       <p:grpSpPr/>
       <p:sp>
         <p:nvSpPr>
-          <p:cNvPr id="2" name="Oval 1"/>
+          <p:cNvPr id="2" name="deckgen:decor"/>
           <p:cNvSpPr/>
           <p:nvPr/>
         </p:nvSpPr>
@@ -10157,7 +10157,7 @@
       </p:sp>
       <p:sp>
         <p:nvSpPr>
-          <p:cNvPr id="3" name="Oval 2"/>
+          <p:cNvPr id="3" name="deckgen:decor"/>
           <p:cNvSpPr/>
           <p:nvPr/>
         </p:nvSpPr>
@@ -10187,7 +10187,7 @@
       </p:sp>
       <p:sp>
         <p:nvSpPr>
-          <p:cNvPr id="4" name="Oval 3"/>
+          <p:cNvPr id="4" name="deckgen:decor"/>
           <p:cNvSpPr/>
           <p:nvPr/>
         </p:nvSpPr>
@@ -11075,7 +11075,7 @@
                 <a:ea typeface="Pretendard"/>
                 <a:cs typeface="Pretendard"/>
               </a:rPr>
-              <a:t>SELECT VERSION(); 8.0 확인</a:t>
+              <a:t>SELECT VERSION(); 8.0 이상 확인</a:t>
             </a:r>
           </a:p>
           <a:p>
@@ -11829,7 +11829,7 @@
       <p:grpSpPr/>
       <p:sp>
         <p:nvSpPr>
-          <p:cNvPr id="2" name="Oval 1"/>
+          <p:cNvPr id="2" name="deckgen:decor"/>
           <p:cNvSpPr/>
           <p:nvPr/>
         </p:nvSpPr>
@@ -11859,7 +11859,7 @@
       </p:sp>
       <p:sp>
         <p:nvSpPr>
-          <p:cNvPr id="3" name="Oval 2"/>
+          <p:cNvPr id="3" name="deckgen:decor"/>
           <p:cNvSpPr/>
           <p:nvPr/>
         </p:nvSpPr>
@@ -11889,7 +11889,7 @@
       </p:sp>
       <p:sp>
         <p:nvSpPr>
-          <p:cNvPr id="4" name="Oval 3"/>
+          <p:cNvPr id="4" name="deckgen:decor"/>
           <p:cNvSpPr/>
           <p:nvPr/>
         </p:nvSpPr>
@@ -12095,7 +12095,7 @@
       </p:sp>
       <p:sp>
         <p:nvSpPr>
-          <p:cNvPr id="10" name="TextBox 9"/>
+          <p:cNvPr id="10" name="deckgen:ornament"/>
           <p:cNvSpPr txBox="1"/>
           <p:nvPr/>
         </p:nvSpPr>
@@ -12191,7 +12191,7 @@
                 <a:ea typeface="Pretendard"/>
                 <a:cs typeface="Pretendard"/>
               </a:rPr>
-              <a:t>8.0 에서는 대부분 비슷 (같은 실행 계획)</a:t>
+              <a:t>9.7 에서도 대부분 비슷 (같은 실행 계획)</a:t>
             </a:r>
           </a:p>
           <a:p>
@@ -12280,7 +12280,7 @@
       </p:sp>
       <p:sp>
         <p:nvSpPr>
-          <p:cNvPr id="14" name="TextBox 13"/>
+          <p:cNvPr id="14" name="deckgen:ornament"/>
           <p:cNvSpPr txBox="1"/>
           <p:nvPr/>
         </p:nvSpPr>
@@ -12465,7 +12465,7 @@
       </p:sp>
       <p:sp>
         <p:nvSpPr>
-          <p:cNvPr id="18" name="TextBox 17"/>
+          <p:cNvPr id="18" name="deckgen:ornament"/>
           <p:cNvSpPr txBox="1"/>
           <p:nvPr/>
         </p:nvSpPr>
@@ -12650,7 +12650,7 @@
       </p:sp>
       <p:sp>
         <p:nvSpPr>
-          <p:cNvPr id="22" name="TextBox 21"/>
+          <p:cNvPr id="22" name="deckgen:ornament"/>
           <p:cNvSpPr txBox="1"/>
           <p:nvPr/>
         </p:nvSpPr>
@@ -12901,7 +12901,7 @@
       <p:grpSpPr/>
       <p:sp>
         <p:nvSpPr>
-          <p:cNvPr id="2" name="Oval 1"/>
+          <p:cNvPr id="2" name="deckgen:decor"/>
           <p:cNvSpPr/>
           <p:nvPr/>
         </p:nvSpPr>
@@ -12931,7 +12931,7 @@
       </p:sp>
       <p:sp>
         <p:nvSpPr>
-          <p:cNvPr id="3" name="Oval 2"/>
+          <p:cNvPr id="3" name="deckgen:decor"/>
           <p:cNvSpPr/>
           <p:nvPr/>
         </p:nvSpPr>
@@ -12961,7 +12961,7 @@
       </p:sp>
       <p:sp>
         <p:nvSpPr>
-          <p:cNvPr id="4" name="Oval 3"/>
+          <p:cNvPr id="4" name="deckgen:decor"/>
           <p:cNvSpPr/>
           <p:nvPr/>
         </p:nvSpPr>
@@ -13167,7 +13167,7 @@
       </p:sp>
       <p:sp>
         <p:nvSpPr>
-          <p:cNvPr id="10" name="TextBox 9"/>
+          <p:cNvPr id="10" name="deckgen:ornament"/>
           <p:cNvSpPr txBox="1"/>
           <p:nvPr/>
         </p:nvSpPr>
@@ -13352,7 +13352,7 @@
       </p:sp>
       <p:sp>
         <p:nvSpPr>
-          <p:cNvPr id="14" name="TextBox 13"/>
+          <p:cNvPr id="14" name="deckgen:ornament"/>
           <p:cNvSpPr txBox="1"/>
           <p:nvPr/>
         </p:nvSpPr>
@@ -13537,7 +13537,7 @@
       </p:sp>
       <p:sp>
         <p:nvSpPr>
-          <p:cNvPr id="18" name="TextBox 17"/>
+          <p:cNvPr id="18" name="deckgen:ornament"/>
           <p:cNvSpPr txBox="1"/>
           <p:nvPr/>
         </p:nvSpPr>
@@ -13722,7 +13722,7 @@
       </p:sp>
       <p:sp>
         <p:nvSpPr>
-          <p:cNvPr id="22" name="TextBox 21"/>
+          <p:cNvPr id="22" name="deckgen:ornament"/>
           <p:cNvSpPr txBox="1"/>
           <p:nvPr/>
         </p:nvSpPr>
@@ -13907,7 +13907,7 @@
                 <a:ea typeface="Pretendard"/>
                 <a:cs typeface="Pretendard"/>
               </a:rPr>
-              <a:t>참고: MySQL 8.0 공식 문서 — with.html · window-functions.html · window-functions-usage.html</a:t>
+              <a:t>참고: MySQL 9.7 공식 문서 — with.html · window-functions.html · window-functions-usage.html</a:t>
             </a:r>
           </a:p>
         </p:txBody>
@@ -14044,7 +14044,7 @@
       <p:grpSpPr/>
       <p:sp>
         <p:nvSpPr>
-          <p:cNvPr id="2" name="Oval 1"/>
+          <p:cNvPr id="2" name="deckgen:decor"/>
           <p:cNvSpPr/>
           <p:nvPr/>
         </p:nvSpPr>
@@ -14074,7 +14074,7 @@
       </p:sp>
       <p:sp>
         <p:nvSpPr>
-          <p:cNvPr id="3" name="Oval 2"/>
+          <p:cNvPr id="3" name="deckgen:decor"/>
           <p:cNvSpPr/>
           <p:nvPr/>
         </p:nvSpPr>
@@ -14104,7 +14104,7 @@
       </p:sp>
       <p:sp>
         <p:nvSpPr>
-          <p:cNvPr id="4" name="Oval 3"/>
+          <p:cNvPr id="4" name="deckgen:decor"/>
           <p:cNvSpPr/>
           <p:nvPr/>
         </p:nvSpPr>
@@ -14310,7 +14310,7 @@
       </p:sp>
       <p:sp>
         <p:nvSpPr>
-          <p:cNvPr id="10" name="TextBox 9"/>
+          <p:cNvPr id="10" name="deckgen:ornament"/>
           <p:cNvSpPr txBox="1"/>
           <p:nvPr/>
         </p:nvSpPr>
@@ -14495,7 +14495,7 @@
       </p:sp>
       <p:sp>
         <p:nvSpPr>
-          <p:cNvPr id="14" name="TextBox 13"/>
+          <p:cNvPr id="14" name="deckgen:ornament"/>
           <p:cNvSpPr txBox="1"/>
           <p:nvPr/>
         </p:nvSpPr>
@@ -14680,7 +14680,7 @@
       </p:sp>
       <p:sp>
         <p:nvSpPr>
-          <p:cNvPr id="18" name="TextBox 17"/>
+          <p:cNvPr id="18" name="deckgen:ornament"/>
           <p:cNvSpPr txBox="1"/>
           <p:nvPr/>
         </p:nvSpPr>
@@ -14865,7 +14865,7 @@
       </p:sp>
       <p:sp>
         <p:nvSpPr>
-          <p:cNvPr id="22" name="TextBox 21"/>
+          <p:cNvPr id="22" name="deckgen:ornament"/>
           <p:cNvSpPr txBox="1"/>
           <p:nvPr/>
         </p:nvSpPr>
